--- a/media/resources/files/Onduktardyn_Orunduk_Maanisi_Jenil_Orto_Oor_L5b1T6F.pptx
+++ b/media/resources/files/Onduktardyn_Orunduk_Maanisi_Jenil_Orto_Oor_L5b1T6F.pptx
@@ -7927,7 +7927,7 @@
                 <a:ea typeface="+mn-ea"/>
                 <a:cs typeface="+mn-cs"/>
               </a:rPr>
-              <a:t>Турдуу пикирлер учун ыраазычылык билдиребиз.</a:t>
+              <a:t>Түрдүү пикирлер үчүн ыраазычылык билдиребиз.</a:t>
             </a:r>
           </a:p>
           <a:p>

--- a/media/resources/files/Onduktardyn_Orunduk_Maanisi_Jenil_Orto_Oor_L5b1T6F.pptx
+++ b/media/resources/files/Onduktardyn_Orunduk_Maanisi_Jenil_Orto_Oor_L5b1T6F.pptx
@@ -2278,7 +2278,7 @@
             </a:r>
             <a:r>
               <a:rPr lang="en-GB" sz="2000" dirty="0"/>
-              <a:t>0.3</a:t>
+              <a:t>0,3</a:t>
             </a:r>
             <a:r>
               <a:rPr lang="ky-KG" sz="2000" dirty="0"/>
@@ -2860,7 +2860,7 @@
             <a:pPr algn="ctr"/>
             <a:r>
               <a:rPr lang="en-GB" sz="2400" dirty="0"/>
-              <a:t>0.56</a:t>
+              <a:t>0,56</a:t>
             </a:r>
           </a:p>
         </p:txBody>
@@ -2944,7 +2944,7 @@
             <a:pPr algn="ctr"/>
             <a:r>
               <a:rPr lang="en-GB" sz="2400" dirty="0"/>
-              <a:t>0.287</a:t>
+              <a:t>0,287</a:t>
             </a:r>
           </a:p>
         </p:txBody>
@@ -3083,7 +3083,7 @@
             </a:r>
             <a:r>
               <a:rPr lang="en-GB" sz="2400" u="sng" dirty="0"/>
-              <a:t>2.2</a:t>
+              <a:t>2,2</a:t>
             </a:r>
           </a:p>
         </p:txBody>
@@ -3167,7 +3167,7 @@
             <a:pPr algn="ctr"/>
             <a:r>
               <a:rPr lang="en-GB" sz="2400" dirty="0"/>
-              <a:t>2.</a:t>
+              <a:t>2,</a:t>
             </a:r>
             <a:r>
               <a:rPr lang="en-GB" sz="2400" u="sng" dirty="0"/>
@@ -4209,7 +4209,7 @@
             <a:pPr algn="ctr"/>
             <a:r>
               <a:rPr lang="ky-KG" sz="2000" dirty="0"/>
-              <a:t>Мисалы: 0.3</a:t>
+              <a:t>Мисалы: 0,3</a:t>
             </a:r>
             <a:endParaRPr lang="en-GB" sz="2000" dirty="0"/>
           </a:p>
@@ -4353,7 +4353,7 @@
             <a:pPr algn="ctr"/>
             <a:r>
               <a:rPr lang="ky-KG" sz="2000" dirty="0"/>
-              <a:t>Мисалы: 3.7</a:t>
+              <a:t>Мисалы: 3,7</a:t>
             </a:r>
             <a:endParaRPr lang="en-GB" sz="2000" dirty="0"/>
           </a:p>
@@ -4498,7 +4498,7 @@
             </a:r>
             <a:r>
               <a:rPr lang="en-GB" sz="2000" dirty="0"/>
-              <a:t>0.06</a:t>
+              <a:t>0,06</a:t>
             </a:r>
           </a:p>
         </p:txBody>
@@ -4590,7 +4590,7 @@
             </a:r>
             <a:r>
               <a:rPr lang="en-GB" sz="2000" dirty="0"/>
-              <a:t>0.3</a:t>
+              <a:t>0,3</a:t>
             </a:r>
             <a:r>
               <a:rPr lang="ky-KG" sz="2000" dirty="0"/>
@@ -4653,7 +4653,7 @@
             </a:r>
             <a:r>
               <a:rPr lang="en-GB" sz="2000" dirty="0"/>
-              <a:t> 0.28</a:t>
+              <a:t> 0,28</a:t>
             </a:r>
           </a:p>
         </p:txBody>
@@ -4841,7 +4841,7 @@
             </a:r>
             <a:r>
               <a:rPr lang="en-GB" sz="2000" dirty="0"/>
-              <a:t>0.0</a:t>
+              <a:t>0,0</a:t>
             </a:r>
             <a:r>
               <a:rPr lang="ky-KG" sz="2000" dirty="0"/>
@@ -4981,7 +4981,7 @@
             </a:r>
             <a:r>
               <a:rPr lang="en-GB" sz="2000" dirty="0"/>
-              <a:t>1.3</a:t>
+              <a:t>1,3</a:t>
             </a:r>
           </a:p>
         </p:txBody>
@@ -5113,7 +5113,7 @@
             </a:r>
             <a:r>
               <a:rPr lang="en-GB" sz="2000" dirty="0"/>
-              <a:t> 0.29</a:t>
+              <a:t> 0,29</a:t>
             </a:r>
           </a:p>
         </p:txBody>
@@ -5245,7 +5245,7 @@
             </a:r>
             <a:r>
               <a:rPr lang="en-GB" sz="2000" dirty="0"/>
-              <a:t>0.307</a:t>
+              <a:t>0,307</a:t>
             </a:r>
           </a:p>
         </p:txBody>
@@ -5380,7 +5380,7 @@
             <a:pPr algn="ctr"/>
             <a:r>
               <a:rPr lang="en-GB" sz="2400" dirty="0"/>
-              <a:t>0.56</a:t>
+              <a:t>0,56</a:t>
             </a:r>
           </a:p>
         </p:txBody>
@@ -5610,7 +5610,7 @@
             <a:pPr algn="ctr"/>
             <a:r>
               <a:rPr lang="en-GB" sz="2400" dirty="0"/>
-              <a:t>0.287</a:t>
+              <a:t>0,287</a:t>
             </a:r>
           </a:p>
         </p:txBody>
@@ -5926,7 +5926,7 @@
             </a:r>
             <a:r>
               <a:rPr lang="en-GB" sz="2400" u="sng" dirty="0"/>
-              <a:t>2.2</a:t>
+              <a:t>2,2</a:t>
             </a:r>
           </a:p>
         </p:txBody>
@@ -6156,7 +6156,7 @@
             <a:pPr algn="ctr"/>
             <a:r>
               <a:rPr lang="en-GB" sz="2400" dirty="0"/>
-              <a:t>2.</a:t>
+              <a:t>2,</a:t>
             </a:r>
             <a:r>
               <a:rPr lang="en-GB" sz="2400" u="sng" dirty="0"/>
